--- a/blocks/B_robot_build/Block_B_실습결과_명령어.pptx
+++ b/blocks/B_robot_build/Block_B_실습결과_명령어.pptx
@@ -10,6 +10,8 @@
     <p:sldId id="258" r:id="rId9"/>
     <p:sldId id="259" r:id="rId10"/>
     <p:sldId id="260" r:id="rId11"/>
+    <p:sldId id="261" r:id="rId12"/>
+    <p:sldId id="262" r:id="rId13"/>
   </p:sldIdLst>
   <p:sldSz cx="12191695" cy="6858000" type="screen4x3"/>
   <p:notesSz cx="6858000" cy="9144000"/>
@@ -4186,6 +4188,333 @@
               </a:defRPr>
             </a:pPr>
             <a:r>
+              <a:t>명령어 동작과 설정 포인트</a:t>
+            </a:r>
+          </a:p>
+        </p:txBody>
+      </p:sp>
+      <p:sp>
+        <p:nvSpPr>
+          <p:cNvPr id="5" name="TextBox 4"/>
+          <p:cNvSpPr txBox="1"/>
+          <p:nvPr/>
+        </p:nvSpPr>
+        <p:spPr>
+          <a:xfrm>
+            <a:off x="411480" y="6556248"/>
+            <a:ext cx="11247120" cy="164592"/>
+          </a:xfrm>
+          <a:prstGeom prst="rect">
+            <a:avLst/>
+          </a:prstGeom>
+          <a:noFill/>
+        </p:spPr>
+        <p:txBody>
+          <a:bodyPr wrap="square" anchor="t">
+            <a:spAutoFit/>
+          </a:bodyPr>
+          <a:lstStyle/>
+          <a:p>
+            <a:pPr>
+              <a:spcAft>
+                <a:spcPts val="500"/>
+              </a:spcAft>
+              <a:defRPr sz="1000" b="0">
+                <a:solidFill>
+                  <a:srgbClr val="667080"/>
+                </a:solidFill>
+                <a:latin typeface="Noto Sans CJK KR"/>
+              </a:defRPr>
+            </a:pPr>
+            <a:r>
+              <a:t>ROS 2 + Gazebo AGV 실습 · 모든 텍스트 최소 10pt</a:t>
+            </a:r>
+          </a:p>
+        </p:txBody>
+      </p:sp>
+      <p:sp>
+        <p:nvSpPr>
+          <p:cNvPr id="6" name="TextBox 5"/>
+          <p:cNvSpPr txBox="1"/>
+          <p:nvPr/>
+        </p:nvSpPr>
+        <p:spPr>
+          <a:xfrm>
+            <a:off x="594360" y="960120"/>
+            <a:ext cx="10972800" cy="411480"/>
+          </a:xfrm>
+          <a:prstGeom prst="rect">
+            <a:avLst/>
+          </a:prstGeom>
+          <a:noFill/>
+        </p:spPr>
+        <p:txBody>
+          <a:bodyPr wrap="square" anchor="t">
+            <a:spAutoFit/>
+          </a:bodyPr>
+          <a:lstStyle/>
+          <a:p>
+            <a:pPr>
+              <a:spcAft>
+                <a:spcPts val="500"/>
+              </a:spcAft>
+              <a:defRPr sz="2100" b="1">
+                <a:solidFill>
+                  <a:srgbClr val="173E6F"/>
+                </a:solidFill>
+                <a:latin typeface="Noto Sans CJK KR"/>
+              </a:defRPr>
+            </a:pPr>
+            <a:r>
+              <a:t>이 명령이 실제로 하는 일</a:t>
+            </a:r>
+          </a:p>
+        </p:txBody>
+      </p:sp>
+      <p:sp>
+        <p:nvSpPr>
+          <p:cNvPr id="7" name="TextBox 6"/>
+          <p:cNvSpPr txBox="1"/>
+          <p:nvPr/>
+        </p:nvSpPr>
+        <p:spPr>
+          <a:xfrm>
+            <a:off x="731520" y="1508760"/>
+            <a:ext cx="10698480" cy="4480560"/>
+          </a:xfrm>
+          <a:prstGeom prst="rect">
+            <a:avLst/>
+          </a:prstGeom>
+          <a:noFill/>
+        </p:spPr>
+        <p:txBody>
+          <a:bodyPr wrap="square" anchor="t">
+            <a:spAutoFit/>
+          </a:bodyPr>
+          <a:lstStyle/>
+          <a:p>
+            <a:pPr>
+              <a:spcAft>
+                <a:spcPts val="500"/>
+              </a:spcAft>
+              <a:defRPr sz="1500" b="0">
+                <a:solidFill>
+                  <a:srgbClr val="212B3D"/>
+                </a:solidFill>
+                <a:latin typeface="Noto Sans CJK KR"/>
+              </a:defRPr>
+            </a:pPr>
+            <a:r>
+              <a:t>• xacro: macro/property/include를 순수 URDF로 펼친다. 원본의 body·wheel 치수를 바꾸면 생성 결과가 함께 바뀐다.</a:t>
+            </a:r>
+          </a:p>
+          <a:p>
+            <a:pPr>
+              <a:spcAft>
+                <a:spcPts val="500"/>
+              </a:spcAft>
+              <a:defRPr sz="1500" b="0">
+                <a:solidFill>
+                  <a:srgbClr val="212B3D"/>
+                </a:solidFill>
+                <a:latin typeface="Noto Sans CJK KR"/>
+              </a:defRPr>
+            </a:pPr>
+            <a:r>
+              <a:t>• check_urdf: root link와 joint 연결을 검사하지만 Gazebo 물리를 실행하지는 않는다.</a:t>
+            </a:r>
+          </a:p>
+          <a:p>
+            <a:pPr>
+              <a:spcAft>
+                <a:spcPts val="500"/>
+              </a:spcAft>
+              <a:defRPr sz="1500" b="0">
+                <a:solidFill>
+                  <a:srgbClr val="212B3D"/>
+                </a:solidFill>
+                <a:latin typeface="Noto Sans CJK KR"/>
+              </a:defRPr>
+            </a:pPr>
+            <a:r>
+              <a:t>• ros2 launch: model URI 경로·World·bridge를 한 LaunchDescription으로 시작한다.</a:t>
+            </a:r>
+          </a:p>
+        </p:txBody>
+      </p:sp>
+      <p:sp>
+        <p:nvSpPr>
+          <p:cNvPr id="8" name="TextBox 7"/>
+          <p:cNvSpPr txBox="1"/>
+          <p:nvPr/>
+        </p:nvSpPr>
+        <p:spPr>
+          <a:xfrm>
+            <a:off x="731520" y="5440680"/>
+            <a:ext cx="10698480" cy="502920"/>
+          </a:xfrm>
+          <a:prstGeom prst="rect">
+            <a:avLst/>
+          </a:prstGeom>
+          <a:noFill/>
+        </p:spPr>
+        <p:txBody>
+          <a:bodyPr wrap="square" anchor="t">
+            <a:spAutoFit/>
+          </a:bodyPr>
+          <a:lstStyle/>
+          <a:p>
+            <a:pPr>
+              <a:spcAft>
+                <a:spcPts val="500"/>
+              </a:spcAft>
+              <a:defRPr sz="1200" b="0">
+                <a:solidFill>
+                  <a:srgbClr val="3F5373"/>
+                </a:solidFill>
+                <a:latin typeface="Noto Sans CJK KR"/>
+              </a:defRPr>
+            </a:pPr>
+            <a:r>
+              <a:t>수치·토픽·방향을 바꿀 때는 해당 Block의 Mxx README에서 구현 파일과 기대 결과를 함께 확인합니다.</a:t>
+            </a:r>
+          </a:p>
+        </p:txBody>
+      </p:sp>
+    </p:spTree>
+  </p:cSld>
+  <p:clrMapOvr>
+    <a:masterClrMapping/>
+  </p:clrMapOvr>
+</p:sld>
+</file>
+
+<file path=ppt/slides/slide5.xml><?xml version="1.0" encoding="utf-8"?>
+<p:sld xmlns:a="http://schemas.openxmlformats.org/drawingml/2006/main" xmlns:p="http://schemas.openxmlformats.org/presentationml/2006/main" xmlns:r="http://schemas.openxmlformats.org/officeDocument/2006/relationships">
+  <p:cSld>
+    <p:spTree>
+      <p:nvGrpSpPr>
+        <p:cNvPr id="1" name=""/>
+        <p:cNvGrpSpPr/>
+        <p:nvPr/>
+      </p:nvGrpSpPr>
+      <p:grpSpPr/>
+      <p:sp>
+        <p:nvSpPr>
+          <p:cNvPr id="2" name="Rectangle 1"/>
+          <p:cNvSpPr/>
+          <p:nvPr/>
+        </p:nvSpPr>
+        <p:spPr>
+          <a:xfrm>
+            <a:off x="0" y="0"/>
+            <a:ext cx="12191695" cy="749808"/>
+          </a:xfrm>
+          <a:prstGeom prst="rect">
+            <a:avLst/>
+          </a:prstGeom>
+          <a:solidFill>
+            <a:srgbClr val="173E6F"/>
+          </a:solidFill>
+          <a:ln>
+            <a:noFill/>
+          </a:ln>
+        </p:spPr>
+        <p:style>
+          <a:lnRef idx="1">
+            <a:schemeClr val="accent1"/>
+          </a:lnRef>
+          <a:fillRef idx="3">
+            <a:schemeClr val="accent1"/>
+          </a:fillRef>
+          <a:effectRef idx="2">
+            <a:schemeClr val="accent1"/>
+          </a:effectRef>
+          <a:fontRef idx="minor">
+            <a:schemeClr val="lt1"/>
+          </a:fontRef>
+        </p:style>
+        <p:txBody>
+          <a:bodyPr rtlCol="0" anchor="ctr"/>
+          <a:lstStyle/>
+          <a:p>
+            <a:pPr algn="ctr"/>
+          </a:p>
+        </p:txBody>
+      </p:sp>
+      <p:sp>
+        <p:nvSpPr>
+          <p:cNvPr id="3" name="TextBox 2"/>
+          <p:cNvSpPr txBox="1"/>
+          <p:nvPr/>
+        </p:nvSpPr>
+        <p:spPr>
+          <a:xfrm>
+            <a:off x="411480" y="137160"/>
+            <a:ext cx="8046720" cy="320040"/>
+          </a:xfrm>
+          <a:prstGeom prst="rect">
+            <a:avLst/>
+          </a:prstGeom>
+          <a:noFill/>
+        </p:spPr>
+        <p:txBody>
+          <a:bodyPr wrap="square" anchor="t">
+            <a:spAutoFit/>
+          </a:bodyPr>
+          <a:lstStyle/>
+          <a:p>
+            <a:pPr>
+              <a:spcAft>
+                <a:spcPts val="500"/>
+              </a:spcAft>
+              <a:defRPr sz="2500" b="1">
+                <a:solidFill>
+                  <a:srgbClr val="FFFFFF"/>
+                </a:solidFill>
+                <a:latin typeface="Noto Sans CJK KR"/>
+              </a:defRPr>
+            </a:pPr>
+            <a:r>
+              <a:t>Block B — AGV 로봇 제작</a:t>
+            </a:r>
+          </a:p>
+        </p:txBody>
+      </p:sp>
+      <p:sp>
+        <p:nvSpPr>
+          <p:cNvPr id="4" name="TextBox 3"/>
+          <p:cNvSpPr txBox="1"/>
+          <p:nvPr/>
+        </p:nvSpPr>
+        <p:spPr>
+          <a:xfrm>
+            <a:off x="8321040" y="182880"/>
+            <a:ext cx="3474720" cy="256032"/>
+          </a:xfrm>
+          <a:prstGeom prst="rect">
+            <a:avLst/>
+          </a:prstGeom>
+          <a:noFill/>
+        </p:spPr>
+        <p:txBody>
+          <a:bodyPr wrap="square" anchor="t">
+            <a:spAutoFit/>
+          </a:bodyPr>
+          <a:lstStyle/>
+          <a:p>
+            <a:pPr>
+              <a:spcAft>
+                <a:spcPts val="500"/>
+              </a:spcAft>
+              <a:defRPr sz="1000" b="0">
+                <a:solidFill>
+                  <a:srgbClr val="DCEAFC"/>
+                </a:solidFill>
+                <a:latin typeface="Noto Sans CJK KR"/>
+              </a:defRPr>
+            </a:pPr>
+            <a:r>
               <a:t>실제 실행 결과</a:t>
             </a:r>
           </a:p>
@@ -4262,7 +4591,248 @@
 </p:sld>
 </file>
 
-<file path=ppt/slides/slide5.xml><?xml version="1.0" encoding="utf-8"?>
+<file path=ppt/slides/slide6.xml><?xml version="1.0" encoding="utf-8"?>
+<p:sld xmlns:a="http://schemas.openxmlformats.org/drawingml/2006/main" xmlns:p="http://schemas.openxmlformats.org/presentationml/2006/main" xmlns:r="http://schemas.openxmlformats.org/officeDocument/2006/relationships">
+  <p:cSld>
+    <p:spTree>
+      <p:nvGrpSpPr>
+        <p:cNvPr id="1" name=""/>
+        <p:cNvGrpSpPr/>
+        <p:nvPr/>
+      </p:nvGrpSpPr>
+      <p:grpSpPr/>
+      <p:sp>
+        <p:nvSpPr>
+          <p:cNvPr id="2" name="Rectangle 1"/>
+          <p:cNvSpPr/>
+          <p:nvPr/>
+        </p:nvSpPr>
+        <p:spPr>
+          <a:xfrm>
+            <a:off x="0" y="0"/>
+            <a:ext cx="12191695" cy="749808"/>
+          </a:xfrm>
+          <a:prstGeom prst="rect">
+            <a:avLst/>
+          </a:prstGeom>
+          <a:solidFill>
+            <a:srgbClr val="173E6F"/>
+          </a:solidFill>
+          <a:ln>
+            <a:noFill/>
+          </a:ln>
+        </p:spPr>
+        <p:style>
+          <a:lnRef idx="1">
+            <a:schemeClr val="accent1"/>
+          </a:lnRef>
+          <a:fillRef idx="3">
+            <a:schemeClr val="accent1"/>
+          </a:fillRef>
+          <a:effectRef idx="2">
+            <a:schemeClr val="accent1"/>
+          </a:effectRef>
+          <a:fontRef idx="minor">
+            <a:schemeClr val="lt1"/>
+          </a:fontRef>
+        </p:style>
+        <p:txBody>
+          <a:bodyPr rtlCol="0" anchor="ctr"/>
+          <a:lstStyle/>
+          <a:p>
+            <a:pPr algn="ctr"/>
+          </a:p>
+        </p:txBody>
+      </p:sp>
+      <p:sp>
+        <p:nvSpPr>
+          <p:cNvPr id="3" name="TextBox 2"/>
+          <p:cNvSpPr txBox="1"/>
+          <p:nvPr/>
+        </p:nvSpPr>
+        <p:spPr>
+          <a:xfrm>
+            <a:off x="411480" y="137160"/>
+            <a:ext cx="8046720" cy="320040"/>
+          </a:xfrm>
+          <a:prstGeom prst="rect">
+            <a:avLst/>
+          </a:prstGeom>
+          <a:noFill/>
+        </p:spPr>
+        <p:txBody>
+          <a:bodyPr wrap="square" anchor="t">
+            <a:spAutoFit/>
+          </a:bodyPr>
+          <a:lstStyle/>
+          <a:p>
+            <a:pPr>
+              <a:spcAft>
+                <a:spcPts val="500"/>
+              </a:spcAft>
+              <a:defRPr sz="2500" b="1">
+                <a:solidFill>
+                  <a:srgbClr val="FFFFFF"/>
+                </a:solidFill>
+                <a:latin typeface="Noto Sans CJK KR"/>
+              </a:defRPr>
+            </a:pPr>
+            <a:r>
+              <a:t>Block B — AGV 로봇 제작</a:t>
+            </a:r>
+          </a:p>
+        </p:txBody>
+      </p:sp>
+      <p:sp>
+        <p:nvSpPr>
+          <p:cNvPr id="4" name="TextBox 3"/>
+          <p:cNvSpPr txBox="1"/>
+          <p:nvPr/>
+        </p:nvSpPr>
+        <p:spPr>
+          <a:xfrm>
+            <a:off x="8321040" y="182880"/>
+            <a:ext cx="3474720" cy="256032"/>
+          </a:xfrm>
+          <a:prstGeom prst="rect">
+            <a:avLst/>
+          </a:prstGeom>
+          <a:noFill/>
+        </p:spPr>
+        <p:txBody>
+          <a:bodyPr wrap="square" anchor="t">
+            <a:spAutoFit/>
+          </a:bodyPr>
+          <a:lstStyle/>
+          <a:p>
+            <a:pPr>
+              <a:spcAft>
+                <a:spcPts val="500"/>
+              </a:spcAft>
+              <a:defRPr sz="1000" b="0">
+                <a:solidFill>
+                  <a:srgbClr val="DCEAFC"/>
+                </a:solidFill>
+                <a:latin typeface="Noto Sans CJK KR"/>
+              </a:defRPr>
+            </a:pPr>
+            <a:r>
+              <a:t>실제 Gazebo / RViz 화면</a:t>
+            </a:r>
+          </a:p>
+        </p:txBody>
+      </p:sp>
+      <p:sp>
+        <p:nvSpPr>
+          <p:cNvPr id="5" name="TextBox 4"/>
+          <p:cNvSpPr txBox="1"/>
+          <p:nvPr/>
+        </p:nvSpPr>
+        <p:spPr>
+          <a:xfrm>
+            <a:off x="411480" y="6556248"/>
+            <a:ext cx="11247120" cy="164592"/>
+          </a:xfrm>
+          <a:prstGeom prst="rect">
+            <a:avLst/>
+          </a:prstGeom>
+          <a:noFill/>
+        </p:spPr>
+        <p:txBody>
+          <a:bodyPr wrap="square" anchor="t">
+            <a:spAutoFit/>
+          </a:bodyPr>
+          <a:lstStyle/>
+          <a:p>
+            <a:pPr>
+              <a:spcAft>
+                <a:spcPts val="500"/>
+              </a:spcAft>
+              <a:defRPr sz="1000" b="0">
+                <a:solidFill>
+                  <a:srgbClr val="667080"/>
+                </a:solidFill>
+                <a:latin typeface="Noto Sans CJK KR"/>
+              </a:defRPr>
+            </a:pPr>
+            <a:r>
+              <a:t>ROS 2 + Gazebo AGV 실습 · 모든 텍스트 최소 10pt</a:t>
+            </a:r>
+          </a:p>
+        </p:txBody>
+      </p:sp>
+      <p:sp>
+        <p:nvSpPr>
+          <p:cNvPr id="6" name="TextBox 5"/>
+          <p:cNvSpPr txBox="1"/>
+          <p:nvPr/>
+        </p:nvSpPr>
+        <p:spPr>
+          <a:xfrm>
+            <a:off x="685800" y="896112"/>
+            <a:ext cx="10881360" cy="274320"/>
+          </a:xfrm>
+          <a:prstGeom prst="rect">
+            <a:avLst/>
+          </a:prstGeom>
+          <a:noFill/>
+        </p:spPr>
+        <p:txBody>
+          <a:bodyPr wrap="square" anchor="t">
+            <a:spAutoFit/>
+          </a:bodyPr>
+          <a:lstStyle/>
+          <a:p>
+            <a:pPr>
+              <a:spcAft>
+                <a:spcPts val="500"/>
+              </a:spcAft>
+              <a:defRPr sz="1600" b="1">
+                <a:solidFill>
+                  <a:srgbClr val="173E6F"/>
+                </a:solidFill>
+                <a:latin typeface="Noto Sans CJK KR"/>
+              </a:defRPr>
+            </a:pPr>
+            <a:r>
+              <a:t>실제 Gazebo Sim: warehouse World에 spawn된 agv entity</a:t>
+            </a:r>
+          </a:p>
+        </p:txBody>
+      </p:sp>
+      <p:pic>
+        <p:nvPicPr>
+          <p:cNvPr id="7" name="Picture 6" descr="gazebo_agv_actual.png"/>
+          <p:cNvPicPr>
+            <a:picLocks noChangeAspect="1"/>
+          </p:cNvPicPr>
+          <p:nvPr/>
+        </p:nvPicPr>
+        <p:blipFill>
+          <a:blip r:embed="rId2"/>
+          <a:stretch>
+            <a:fillRect/>
+          </a:stretch>
+        </p:blipFill>
+        <p:spPr>
+          <a:xfrm>
+            <a:off x="3063240" y="1234440"/>
+            <a:ext cx="5675102" cy="5029200"/>
+          </a:xfrm>
+          <a:prstGeom prst="rect">
+            <a:avLst/>
+          </a:prstGeom>
+        </p:spPr>
+      </p:pic>
+    </p:spTree>
+  </p:cSld>
+  <p:clrMapOvr>
+    <a:masterClrMapping/>
+  </p:clrMapOvr>
+</p:sld>
+</file>
+
+<file path=ppt/slides/slide7.xml><?xml version="1.0" encoding="utf-8"?>
 <p:sld xmlns:a="http://schemas.openxmlformats.org/drawingml/2006/main" xmlns:p="http://schemas.openxmlformats.org/presentationml/2006/main" xmlns:r="http://schemas.openxmlformats.org/officeDocument/2006/relationships">
   <p:cSld>
     <p:spTree>

--- a/blocks/B_robot_build/Block_B_실습결과_명령어.pptx
+++ b/blocks/B_robot_build/Block_B_실습결과_명령어.pptx
@@ -12,6 +12,8 @@
     <p:sldId id="260" r:id="rId11"/>
     <p:sldId id="261" r:id="rId12"/>
     <p:sldId id="262" r:id="rId13"/>
+    <p:sldId id="263" r:id="rId14"/>
+    <p:sldId id="264" r:id="rId15"/>
   </p:sldIdLst>
   <p:sldSz cx="12191695" cy="6858000" type="screen4x3"/>
   <p:notesSz cx="6858000" cy="9144000"/>
@@ -3794,7 +3796,7 @@
               </a:defRPr>
             </a:pPr>
             <a:r>
-              <a:t>명령어 실행 순서</a:t>
+              <a:t>초심자 파일 제작 실습 1/2</a:t>
             </a:r>
           </a:p>
         </p:txBody>
@@ -3846,8 +3848,8 @@
         </p:nvSpPr>
         <p:spPr>
           <a:xfrm>
-            <a:off x="594360" y="932688"/>
-            <a:ext cx="10972800" cy="320040"/>
+            <a:off x="502920" y="841248"/>
+            <a:ext cx="11064240" cy="274320"/>
           </a:xfrm>
           <a:prstGeom prst="rect">
             <a:avLst/>
@@ -3864,7 +3866,7 @@
               <a:spcAft>
                 <a:spcPts val="500"/>
               </a:spcAft>
-              <a:defRPr sz="2100" b="1">
+              <a:defRPr sz="1900" b="1">
                 <a:solidFill>
                   <a:srgbClr val="173E6F"/>
                 </a:solidFill>
@@ -3872,21 +3874,99 @@
               </a:defRPr>
             </a:pPr>
             <a:r>
-              <a:t>권장 실행 순서</a:t>
-            </a:r>
-          </a:p>
-        </p:txBody>
-      </p:sp>
-      <p:sp>
-        <p:nvSpPr>
-          <p:cNvPr id="7" name="Rounded Rectangle 6"/>
+              <a:t>RViz용 로봇 조립 파일 만들기 (URDF/Xacro)</a:t>
+            </a:r>
+          </a:p>
+        </p:txBody>
+      </p:sp>
+      <p:sp>
+        <p:nvSpPr>
+          <p:cNvPr id="7" name="TextBox 6"/>
+          <p:cNvSpPr txBox="1"/>
+          <p:nvPr/>
+        </p:nvSpPr>
+        <p:spPr>
+          <a:xfrm>
+            <a:off x="530352" y="1161288"/>
+            <a:ext cx="10972800" cy="201168"/>
+          </a:xfrm>
+          <a:prstGeom prst="rect">
+            <a:avLst/>
+          </a:prstGeom>
+          <a:noFill/>
+        </p:spPr>
+        <p:txBody>
+          <a:bodyPr wrap="square" anchor="t">
+            <a:spAutoFit/>
+          </a:bodyPr>
+          <a:lstStyle/>
+          <a:p>
+            <a:pPr>
+              <a:spcAft>
+                <a:spcPts val="500"/>
+              </a:spcAft>
+              <a:defRPr sz="1100" b="0">
+                <a:solidFill>
+                  <a:srgbClr val="4C5B74"/>
+                </a:solidFill>
+                <a:latin typeface="Noto Sans CJK KR"/>
+              </a:defRPr>
+            </a:pPr>
+            <a:r>
+              <a:t>실제 파일: agv_ws/src/agv_description/urdf/agv.urdf.xacro</a:t>
+            </a:r>
+          </a:p>
+        </p:txBody>
+      </p:sp>
+      <p:sp>
+        <p:nvSpPr>
+          <p:cNvPr id="8" name="TextBox 7"/>
+          <p:cNvSpPr txBox="1"/>
+          <p:nvPr/>
+        </p:nvSpPr>
+        <p:spPr>
+          <a:xfrm>
+            <a:off x="530352" y="1362456"/>
+            <a:ext cx="10972800" cy="182880"/>
+          </a:xfrm>
+          <a:prstGeom prst="rect">
+            <a:avLst/>
+          </a:prstGeom>
+          <a:noFill/>
+        </p:spPr>
+        <p:txBody>
+          <a:bodyPr wrap="square" anchor="t">
+            <a:spAutoFit/>
+          </a:bodyPr>
+          <a:lstStyle/>
+          <a:p>
+            <a:pPr>
+              <a:spcAft>
+                <a:spcPts val="500"/>
+              </a:spcAft>
+              <a:defRPr sz="1000" b="0">
+                <a:solidFill>
+                  <a:srgbClr val="17638C"/>
+                </a:solidFill>
+                <a:latin typeface="Noto Sans CJK KR"/>
+              </a:defRPr>
+            </a:pPr>
+            <a:r>
+              <a:t>처음 만들 때: mkdir -p agv_description/urdf  # 패키지 안에 URDF/Xacro 폴더 준비</a:t>
+            </a:r>
+          </a:p>
+        </p:txBody>
+      </p:sp>
+      <p:sp>
+        <p:nvSpPr>
+          <p:cNvPr id="9" name="Rounded Rectangle 8"/>
           <p:cNvSpPr/>
           <p:nvPr/>
         </p:nvSpPr>
         <p:spPr>
           <a:xfrm>
-            <a:off x="594360" y="1417320"/>
-            <a:ext cx="10972800" cy="4526280"/>
+            <a:off x="502920" y="1627632"/>
+            <a:ext cx="5806440" cy="4416552"/>
           </a:xfrm>
           <a:prstGeom prst="roundRect">
             <a:avLst/>
@@ -3915,14 +3995,14 @@
           </a:fontRef>
         </p:style>
         <p:txBody>
-          <a:bodyPr rtlCol="0" anchor="ctr" lIns="237744" tIns="182880"/>
+          <a:bodyPr rtlCol="0" anchor="ctr" lIns="182880" tIns="137160"/>
           <a:lstStyle/>
           <a:p>
             <a:pPr algn="ctr">
               <a:spcAft>
-                <a:spcPts val="700"/>
-              </a:spcAft>
-              <a:defRPr sz="1100">
+                <a:spcPts val="300"/>
+              </a:spcAft>
+              <a:defRPr sz="1000">
                 <a:solidFill>
                   <a:srgbClr val="DFEDFF"/>
                 </a:solidFill>
@@ -3930,15 +4010,15 @@
               </a:defRPr>
             </a:pPr>
             <a:r>
-              <a:t>cd /home/lab4090/ros2_curri/agv_ws</a:t>
-            </a:r>
-          </a:p>
-          <a:p>
-            <a:pPr>
-              <a:spcAft>
-                <a:spcPts val="700"/>
-              </a:spcAft>
-              <a:defRPr sz="1100">
+              <a:t>&lt;xacro:property name='wheel_radius' value='0.08'/&gt;</a:t>
+            </a:r>
+          </a:p>
+          <a:p>
+            <a:pPr>
+              <a:spcAft>
+                <a:spcPts val="300"/>
+              </a:spcAft>
+              <a:defRPr sz="1000">
                 <a:solidFill>
                   <a:srgbClr val="DFEDFF"/>
                 </a:solidFill>
@@ -3946,15 +4026,15 @@
               </a:defRPr>
             </a:pPr>
             <a:r>
-              <a:t>source /opt/ros/jazzy/setup.bash</a:t>
-            </a:r>
-          </a:p>
-          <a:p>
-            <a:pPr>
-              <a:spcAft>
-                <a:spcPts val="700"/>
-              </a:spcAft>
-              <a:defRPr sz="1100">
+              <a:t>&lt;link name='base_link'&gt;</a:t>
+            </a:r>
+          </a:p>
+          <a:p>
+            <a:pPr>
+              <a:spcAft>
+                <a:spcPts val="300"/>
+              </a:spcAft>
+              <a:defRPr sz="1000">
                 <a:solidFill>
                   <a:srgbClr val="DFEDFF"/>
                 </a:solidFill>
@@ -3962,15 +4042,15 @@
               </a:defRPr>
             </a:pPr>
             <a:r>
-              <a:t>source install/setup.bash</a:t>
-            </a:r>
-          </a:p>
-          <a:p>
-            <a:pPr>
-              <a:spcAft>
-                <a:spcPts val="700"/>
-              </a:spcAft>
-              <a:defRPr sz="1100">
+              <a:t>  &lt;visual&gt;&lt;geometry&gt;&lt;box size='0.60 0.42 0.16'/&gt;&lt;/geometry&gt;&lt;/visual&gt;</a:t>
+            </a:r>
+          </a:p>
+          <a:p>
+            <a:pPr>
+              <a:spcAft>
+                <a:spcPts val="300"/>
+              </a:spcAft>
+              <a:defRPr sz="1000">
                 <a:solidFill>
                   <a:srgbClr val="DFEDFF"/>
                 </a:solidFill>
@@ -3978,15 +4058,15 @@
               </a:defRPr>
             </a:pPr>
             <a:r>
-              <a:t>xacro src/agv_description/urdf/agv.urdf.xacro &gt; /tmp/agv.urdf</a:t>
-            </a:r>
-          </a:p>
-          <a:p>
-            <a:pPr>
-              <a:spcAft>
-                <a:spcPts val="700"/>
-              </a:spcAft>
-              <a:defRPr sz="1100">
+              <a:t>&lt;/link&gt;</a:t>
+            </a:r>
+          </a:p>
+          <a:p>
+            <a:pPr>
+              <a:spcAft>
+                <a:spcPts val="300"/>
+              </a:spcAft>
+              <a:defRPr sz="1000">
                 <a:solidFill>
                   <a:srgbClr val="DFEDFF"/>
                 </a:solidFill>
@@ -3994,15 +4074,15 @@
               </a:defRPr>
             </a:pPr>
             <a:r>
-              <a:t>check_urdf /tmp/agv.urdf</a:t>
-            </a:r>
-          </a:p>
-          <a:p>
-            <a:pPr>
-              <a:spcAft>
-                <a:spcPts val="700"/>
-              </a:spcAft>
-              <a:defRPr sz="1100">
+              <a:t>&lt;xacro:agv_wheel side='left' y='${wheel_base/2}'</a:t>
+            </a:r>
+          </a:p>
+          <a:p>
+            <a:pPr>
+              <a:spcAft>
+                <a:spcPts val="300"/>
+              </a:spcAft>
+              <a:defRPr sz="1000">
                 <a:solidFill>
                   <a:srgbClr val="DFEDFF"/>
                 </a:solidFill>
@@ -4010,21 +4090,53 @@
               </a:defRPr>
             </a:pPr>
             <a:r>
-              <a:t>ros2 launch agv_gazebo gazebo.launch.py</a:t>
-            </a:r>
-          </a:p>
-        </p:txBody>
-      </p:sp>
-      <p:sp>
-        <p:nvSpPr>
-          <p:cNvPr id="8" name="TextBox 7"/>
+              <a:t>                 radius='${wheel_radius}' width='${wheel_width}'/&gt;</a:t>
+            </a:r>
+          </a:p>
+          <a:p>
+            <a:pPr>
+              <a:spcAft>
+                <a:spcPts val="300"/>
+              </a:spcAft>
+              <a:defRPr sz="1000">
+                <a:solidFill>
+                  <a:srgbClr val="DFEDFF"/>
+                </a:solidFill>
+                <a:latin typeface="Noto Sans CJK KR"/>
+              </a:defRPr>
+            </a:pPr>
+            <a:r>
+              <a:t>&lt;xacro:fixed_sensor name='lidar' parent='base_link'</a:t>
+            </a:r>
+          </a:p>
+          <a:p>
+            <a:pPr>
+              <a:spcAft>
+                <a:spcPts val="300"/>
+              </a:spcAft>
+              <a:defRPr sz="1000">
+                <a:solidFill>
+                  <a:srgbClr val="DFEDFF"/>
+                </a:solidFill>
+                <a:latin typeface="Noto Sans CJK KR"/>
+              </a:defRPr>
+            </a:pPr>
+            <a:r>
+              <a:t>                    xyz='0.12 0 0.28' rpy='0 0 0' size='0.09 0.09 0.05'/&gt;</a:t>
+            </a:r>
+          </a:p>
+        </p:txBody>
+      </p:sp>
+      <p:sp>
+        <p:nvSpPr>
+          <p:cNvPr id="10" name="TextBox 9"/>
           <p:cNvSpPr txBox="1"/>
           <p:nvPr/>
         </p:nvSpPr>
         <p:spPr>
           <a:xfrm>
-            <a:off x="685800" y="6089904"/>
-            <a:ext cx="10789920" cy="256032"/>
+            <a:off x="6537960" y="1627632"/>
+            <a:ext cx="4892040" cy="320040"/>
           </a:xfrm>
           <a:prstGeom prst="rect">
             <a:avLst/>
@@ -4041,15 +4153,164 @@
               <a:spcAft>
                 <a:spcPts val="500"/>
               </a:spcAft>
-              <a:defRPr sz="1000" b="0">
-                <a:solidFill>
-                  <a:srgbClr val="505C70"/>
-                </a:solidFill>
-                <a:latin typeface="Noto Sans CJK KR"/>
-              </a:defRPr>
-            </a:pPr>
-            <a:r>
-              <a:t>명령은 Block README의 순서와 동일합니다. 새 터미널에서도 ROS와 workspace를 source해야 합니다.</a:t>
+              <a:defRPr sz="1600" b="1">
+                <a:solidFill>
+                  <a:srgbClr val="173E6F"/>
+                </a:solidFill>
+                <a:latin typeface="Noto Sans CJK KR"/>
+              </a:defRPr>
+            </a:pPr>
+            <a:r>
+              <a:t>만드는 순서</a:t>
+            </a:r>
+          </a:p>
+        </p:txBody>
+      </p:sp>
+      <p:sp>
+        <p:nvSpPr>
+          <p:cNvPr id="11" name="TextBox 10"/>
+          <p:cNvSpPr txBox="1"/>
+          <p:nvPr/>
+        </p:nvSpPr>
+        <p:spPr>
+          <a:xfrm>
+            <a:off x="6565392" y="1975104"/>
+            <a:ext cx="4800600" cy="2258568"/>
+          </a:xfrm>
+          <a:prstGeom prst="rect">
+            <a:avLst/>
+          </a:prstGeom>
+          <a:noFill/>
+        </p:spPr>
+        <p:txBody>
+          <a:bodyPr wrap="square" anchor="t">
+            <a:spAutoFit/>
+          </a:bodyPr>
+          <a:lstStyle/>
+          <a:p>
+            <a:pPr>
+              <a:spcAft>
+                <a:spcPts val="500"/>
+              </a:spcAft>
+              <a:defRPr sz="1200" b="0">
+                <a:solidFill>
+                  <a:srgbClr val="212B3D"/>
+                </a:solidFill>
+                <a:latin typeface="Noto Sans CJK KR"/>
+              </a:defRPr>
+            </a:pPr>
+            <a:r>
+              <a:t>• 1. base_link에 visual·collision·inertial을 정의합니다.</a:t>
+            </a:r>
+          </a:p>
+          <a:p>
+            <a:pPr>
+              <a:spcAft>
+                <a:spcPts val="500"/>
+              </a:spcAft>
+              <a:defRPr sz="1200" b="0">
+                <a:solidFill>
+                  <a:srgbClr val="212B3D"/>
+                </a:solidFill>
+                <a:latin typeface="Noto Sans CJK KR"/>
+              </a:defRPr>
+            </a:pPr>
+            <a:r>
+              <a:t>• 2. wheel_radius 같은 property를 먼저 선언하고 left/right wheel macro에 전달합니다.</a:t>
+            </a:r>
+          </a:p>
+          <a:p>
+            <a:pPr>
+              <a:spcAft>
+                <a:spcPts val="500"/>
+              </a:spcAft>
+              <a:defRPr sz="1200" b="0">
+                <a:solidFill>
+                  <a:srgbClr val="212B3D"/>
+                </a:solidFill>
+                <a:latin typeface="Noto Sans CJK KR"/>
+              </a:defRPr>
+            </a:pPr>
+            <a:r>
+              <a:t>• 3. camera·LiDAR·IMU는 fixed joint로 base_link에 연결한 뒤 xacro/check_urdf로 검사합니다.</a:t>
+            </a:r>
+          </a:p>
+        </p:txBody>
+      </p:sp>
+      <p:sp>
+        <p:nvSpPr>
+          <p:cNvPr id="12" name="TextBox 11"/>
+          <p:cNvSpPr txBox="1"/>
+          <p:nvPr/>
+        </p:nvSpPr>
+        <p:spPr>
+          <a:xfrm>
+            <a:off x="6565392" y="4480560"/>
+            <a:ext cx="4800600" cy="320040"/>
+          </a:xfrm>
+          <a:prstGeom prst="rect">
+            <a:avLst/>
+          </a:prstGeom>
+          <a:noFill/>
+        </p:spPr>
+        <p:txBody>
+          <a:bodyPr wrap="square" anchor="t">
+            <a:spAutoFit/>
+          </a:bodyPr>
+          <a:lstStyle/>
+          <a:p>
+            <a:pPr>
+              <a:spcAft>
+                <a:spcPts val="500"/>
+              </a:spcAft>
+              <a:defRPr sz="1600" b="1">
+                <a:solidFill>
+                  <a:srgbClr val="173E6F"/>
+                </a:solidFill>
+                <a:latin typeface="Noto Sans CJK KR"/>
+              </a:defRPr>
+            </a:pPr>
+            <a:r>
+              <a:t>실행하면 이렇게 됩니다</a:t>
+            </a:r>
+          </a:p>
+        </p:txBody>
+      </p:sp>
+      <p:sp>
+        <p:nvSpPr>
+          <p:cNvPr id="13" name="TextBox 12"/>
+          <p:cNvSpPr txBox="1"/>
+          <p:nvPr/>
+        </p:nvSpPr>
+        <p:spPr>
+          <a:xfrm>
+            <a:off x="6565392" y="4892040"/>
+            <a:ext cx="4800600" cy="822960"/>
+          </a:xfrm>
+          <a:prstGeom prst="rect">
+            <a:avLst/>
+          </a:prstGeom>
+          <a:noFill/>
+        </p:spPr>
+        <p:txBody>
+          <a:bodyPr wrap="square" anchor="t">
+            <a:spAutoFit/>
+          </a:bodyPr>
+          <a:lstStyle/>
+          <a:p>
+            <a:pPr>
+              <a:spcAft>
+                <a:spcPts val="500"/>
+              </a:spcAft>
+              <a:defRPr sz="1200" b="0">
+                <a:solidFill>
+                  <a:srgbClr val="212B3D"/>
+                </a:solidFill>
+                <a:latin typeface="Noto Sans CJK KR"/>
+              </a:defRPr>
+            </a:pPr>
+            <a:r>
+              <a:t>xacro가 순수 URDF를 만들고, RViz에는 파란 body·두 바퀴·세 센서 frame이 보입니다.</a:t>
             </a:r>
           </a:p>
         </p:txBody>
@@ -4188,7 +4449,7 @@
               </a:defRPr>
             </a:pPr>
             <a:r>
-              <a:t>명령어 동작과 설정 포인트</a:t>
+              <a:t>초심자 파일 제작 실습 2/2</a:t>
             </a:r>
           </a:p>
         </p:txBody>
@@ -4240,8 +4501,8 @@
         </p:nvSpPr>
         <p:spPr>
           <a:xfrm>
-            <a:off x="594360" y="960120"/>
-            <a:ext cx="10972800" cy="411480"/>
+            <a:off x="502920" y="841248"/>
+            <a:ext cx="11064240" cy="274320"/>
           </a:xfrm>
           <a:prstGeom prst="rect">
             <a:avLst/>
@@ -4258,7 +4519,7 @@
               <a:spcAft>
                 <a:spcPts val="500"/>
               </a:spcAft>
-              <a:defRPr sz="2100" b="1">
+              <a:defRPr sz="1900" b="1">
                 <a:solidFill>
                   <a:srgbClr val="173E6F"/>
                 </a:solidFill>
@@ -4266,7 +4527,7 @@
               </a:defRPr>
             </a:pPr>
             <a:r>
-              <a:t>이 명령이 실제로 하는 일</a:t>
+              <a:t>Gazebo 물리·센서 파일 만들기 (SDF)</a:t>
             </a:r>
           </a:p>
         </p:txBody>
@@ -4279,8 +4540,8 @@
         </p:nvSpPr>
         <p:spPr>
           <a:xfrm>
-            <a:off x="731520" y="1508760"/>
-            <a:ext cx="10698480" cy="4480560"/>
+            <a:off x="530352" y="1161288"/>
+            <a:ext cx="10972800" cy="201168"/>
           </a:xfrm>
           <a:prstGeom prst="rect">
             <a:avLst/>
@@ -4297,47 +4558,15 @@
               <a:spcAft>
                 <a:spcPts val="500"/>
               </a:spcAft>
-              <a:defRPr sz="1500" b="0">
-                <a:solidFill>
-                  <a:srgbClr val="212B3D"/>
-                </a:solidFill>
-                <a:latin typeface="Noto Sans CJK KR"/>
-              </a:defRPr>
-            </a:pPr>
-            <a:r>
-              <a:t>• xacro: macro/property/include를 순수 URDF로 펼친다. 원본의 body·wheel 치수를 바꾸면 생성 결과가 함께 바뀐다.</a:t>
-            </a:r>
-          </a:p>
-          <a:p>
-            <a:pPr>
-              <a:spcAft>
-                <a:spcPts val="500"/>
-              </a:spcAft>
-              <a:defRPr sz="1500" b="0">
-                <a:solidFill>
-                  <a:srgbClr val="212B3D"/>
-                </a:solidFill>
-                <a:latin typeface="Noto Sans CJK KR"/>
-              </a:defRPr>
-            </a:pPr>
-            <a:r>
-              <a:t>• check_urdf: root link와 joint 연결을 검사하지만 Gazebo 물리를 실행하지는 않는다.</a:t>
-            </a:r>
-          </a:p>
-          <a:p>
-            <a:pPr>
-              <a:spcAft>
-                <a:spcPts val="500"/>
-              </a:spcAft>
-              <a:defRPr sz="1500" b="0">
-                <a:solidFill>
-                  <a:srgbClr val="212B3D"/>
-                </a:solidFill>
-                <a:latin typeface="Noto Sans CJK KR"/>
-              </a:defRPr>
-            </a:pPr>
-            <a:r>
-              <a:t>• ros2 launch: model URI 경로·World·bridge를 한 LaunchDescription으로 시작한다.</a:t>
+              <a:defRPr sz="1100" b="0">
+                <a:solidFill>
+                  <a:srgbClr val="4C5B74"/>
+                </a:solidFill>
+                <a:latin typeface="Noto Sans CJK KR"/>
+              </a:defRPr>
+            </a:pPr>
+            <a:r>
+              <a:t>실제 파일: agv_ws/src/agv_gazebo/models/agv/model.sdf</a:t>
             </a:r>
           </a:p>
         </p:txBody>
@@ -4350,8 +4579,8 @@
         </p:nvSpPr>
         <p:spPr>
           <a:xfrm>
-            <a:off x="731520" y="5440680"/>
-            <a:ext cx="10698480" cy="502920"/>
+            <a:off x="530352" y="1362456"/>
+            <a:ext cx="10972800" cy="182880"/>
           </a:xfrm>
           <a:prstGeom prst="rect">
             <a:avLst/>
@@ -4368,15 +4597,389 @@
               <a:spcAft>
                 <a:spcPts val="500"/>
               </a:spcAft>
+              <a:defRPr sz="1000" b="0">
+                <a:solidFill>
+                  <a:srgbClr val="17638C"/>
+                </a:solidFill>
+                <a:latin typeface="Noto Sans CJK KR"/>
+              </a:defRPr>
+            </a:pPr>
+            <a:r>
+              <a:t>처음 만들 때: mkdir -p agv_gazebo/models/agv  # model.config와 model.sdf를 같은 폴더에 둠</a:t>
+            </a:r>
+          </a:p>
+        </p:txBody>
+      </p:sp>
+      <p:sp>
+        <p:nvSpPr>
+          <p:cNvPr id="9" name="Rounded Rectangle 8"/>
+          <p:cNvSpPr/>
+          <p:nvPr/>
+        </p:nvSpPr>
+        <p:spPr>
+          <a:xfrm>
+            <a:off x="502920" y="1627632"/>
+            <a:ext cx="5806440" cy="4416552"/>
+          </a:xfrm>
+          <a:prstGeom prst="roundRect">
+            <a:avLst/>
+          </a:prstGeom>
+          <a:solidFill>
+            <a:srgbClr val="141C2A"/>
+          </a:solidFill>
+          <a:ln>
+            <a:solidFill>
+              <a:srgbClr val="40506E"/>
+            </a:solidFill>
+          </a:ln>
+        </p:spPr>
+        <p:style>
+          <a:lnRef idx="1">
+            <a:schemeClr val="accent1"/>
+          </a:lnRef>
+          <a:fillRef idx="3">
+            <a:schemeClr val="accent1"/>
+          </a:fillRef>
+          <a:effectRef idx="2">
+            <a:schemeClr val="accent1"/>
+          </a:effectRef>
+          <a:fontRef idx="minor">
+            <a:schemeClr val="lt1"/>
+          </a:fontRef>
+        </p:style>
+        <p:txBody>
+          <a:bodyPr rtlCol="0" anchor="ctr" lIns="182880" tIns="137160"/>
+          <a:lstStyle/>
+          <a:p>
+            <a:pPr algn="ctr">
+              <a:spcAft>
+                <a:spcPts val="300"/>
+              </a:spcAft>
+              <a:defRPr sz="1000">
+                <a:solidFill>
+                  <a:srgbClr val="DFEDFF"/>
+                </a:solidFill>
+                <a:latin typeface="Noto Sans CJK KR"/>
+              </a:defRPr>
+            </a:pPr>
+            <a:r>
+              <a:t>&lt;sensor name='lidar' type='gpu_lidar'&gt;</a:t>
+            </a:r>
+          </a:p>
+          <a:p>
+            <a:pPr>
+              <a:spcAft>
+                <a:spcPts val="300"/>
+              </a:spcAft>
+              <a:defRPr sz="1000">
+                <a:solidFill>
+                  <a:srgbClr val="DFEDFF"/>
+                </a:solidFill>
+                <a:latin typeface="Noto Sans CJK KR"/>
+              </a:defRPr>
+            </a:pPr>
+            <a:r>
+              <a:t>  &lt;topic&gt;/scan&lt;/topic&gt;&lt;update_rate&gt;10&lt;/update_rate&gt;</a:t>
+            </a:r>
+          </a:p>
+          <a:p>
+            <a:pPr>
+              <a:spcAft>
+                <a:spcPts val="300"/>
+              </a:spcAft>
+              <a:defRPr sz="1000">
+                <a:solidFill>
+                  <a:srgbClr val="DFEDFF"/>
+                </a:solidFill>
+                <a:latin typeface="Noto Sans CJK KR"/>
+              </a:defRPr>
+            </a:pPr>
+            <a:r>
+              <a:t>  &lt;lidar&gt;&lt;scan&gt;&lt;horizontal&gt;&lt;samples&gt;720&lt;/samples&gt;&lt;/horizontal&gt;&lt;/scan&gt;&lt;/lidar&gt;</a:t>
+            </a:r>
+          </a:p>
+          <a:p>
+            <a:pPr>
+              <a:spcAft>
+                <a:spcPts val="300"/>
+              </a:spcAft>
+              <a:defRPr sz="1000">
+                <a:solidFill>
+                  <a:srgbClr val="DFEDFF"/>
+                </a:solidFill>
+                <a:latin typeface="Noto Sans CJK KR"/>
+              </a:defRPr>
+            </a:pPr>
+            <a:r>
+              <a:t>&lt;/sensor&gt;</a:t>
+            </a:r>
+          </a:p>
+          <a:p>
+            <a:pPr>
+              <a:spcAft>
+                <a:spcPts val="300"/>
+              </a:spcAft>
+              <a:defRPr sz="1000">
+                <a:solidFill>
+                  <a:srgbClr val="DFEDFF"/>
+                </a:solidFill>
+                <a:latin typeface="Noto Sans CJK KR"/>
+              </a:defRPr>
+            </a:pPr>
+            <a:r>
+              <a:t>&lt;plugin filename='gz-sim-diff-drive-system'&gt;</a:t>
+            </a:r>
+          </a:p>
+          <a:p>
+            <a:pPr>
+              <a:spcAft>
+                <a:spcPts val="300"/>
+              </a:spcAft>
+              <a:defRPr sz="1000">
+                <a:solidFill>
+                  <a:srgbClr val="DFEDFF"/>
+                </a:solidFill>
+                <a:latin typeface="Noto Sans CJK KR"/>
+              </a:defRPr>
+            </a:pPr>
+            <a:r>
+              <a:t>  &lt;left_joint&gt;left_wheel_joint&lt;/left_joint&gt;</a:t>
+            </a:r>
+          </a:p>
+          <a:p>
+            <a:pPr>
+              <a:spcAft>
+                <a:spcPts val="300"/>
+              </a:spcAft>
+              <a:defRPr sz="1000">
+                <a:solidFill>
+                  <a:srgbClr val="DFEDFF"/>
+                </a:solidFill>
+                <a:latin typeface="Noto Sans CJK KR"/>
+              </a:defRPr>
+            </a:pPr>
+            <a:r>
+              <a:t>  &lt;right_joint&gt;right_wheel_joint&lt;/right_joint&gt;</a:t>
+            </a:r>
+          </a:p>
+          <a:p>
+            <a:pPr>
+              <a:spcAft>
+                <a:spcPts val="300"/>
+              </a:spcAft>
+              <a:defRPr sz="1000">
+                <a:solidFill>
+                  <a:srgbClr val="DFEDFF"/>
+                </a:solidFill>
+                <a:latin typeface="Noto Sans CJK KR"/>
+              </a:defRPr>
+            </a:pPr>
+            <a:r>
+              <a:t>  &lt;wheel_separation&gt;0.38&lt;/wheel_separation&gt;&lt;wheel_radius&gt;0.08&lt;/wheel_radius&gt;</a:t>
+            </a:r>
+          </a:p>
+          <a:p>
+            <a:pPr>
+              <a:spcAft>
+                <a:spcPts val="300"/>
+              </a:spcAft>
+              <a:defRPr sz="1000">
+                <a:solidFill>
+                  <a:srgbClr val="DFEDFF"/>
+                </a:solidFill>
+                <a:latin typeface="Noto Sans CJK KR"/>
+              </a:defRPr>
+            </a:pPr>
+            <a:r>
+              <a:t>&lt;/plugin&gt;</a:t>
+            </a:r>
+          </a:p>
+        </p:txBody>
+      </p:sp>
+      <p:sp>
+        <p:nvSpPr>
+          <p:cNvPr id="10" name="TextBox 9"/>
+          <p:cNvSpPr txBox="1"/>
+          <p:nvPr/>
+        </p:nvSpPr>
+        <p:spPr>
+          <a:xfrm>
+            <a:off x="6537960" y="1627632"/>
+            <a:ext cx="4892040" cy="320040"/>
+          </a:xfrm>
+          <a:prstGeom prst="rect">
+            <a:avLst/>
+          </a:prstGeom>
+          <a:noFill/>
+        </p:spPr>
+        <p:txBody>
+          <a:bodyPr wrap="square" anchor="t">
+            <a:spAutoFit/>
+          </a:bodyPr>
+          <a:lstStyle/>
+          <a:p>
+            <a:pPr>
+              <a:spcAft>
+                <a:spcPts val="500"/>
+              </a:spcAft>
+              <a:defRPr sz="1600" b="1">
+                <a:solidFill>
+                  <a:srgbClr val="173E6F"/>
+                </a:solidFill>
+                <a:latin typeface="Noto Sans CJK KR"/>
+              </a:defRPr>
+            </a:pPr>
+            <a:r>
+              <a:t>만드는 순서</a:t>
+            </a:r>
+          </a:p>
+        </p:txBody>
+      </p:sp>
+      <p:sp>
+        <p:nvSpPr>
+          <p:cNvPr id="11" name="TextBox 10"/>
+          <p:cNvSpPr txBox="1"/>
+          <p:nvPr/>
+        </p:nvSpPr>
+        <p:spPr>
+          <a:xfrm>
+            <a:off x="6565392" y="1975104"/>
+            <a:ext cx="4800600" cy="2258568"/>
+          </a:xfrm>
+          <a:prstGeom prst="rect">
+            <a:avLst/>
+          </a:prstGeom>
+          <a:noFill/>
+        </p:spPr>
+        <p:txBody>
+          <a:bodyPr wrap="square" anchor="t">
+            <a:spAutoFit/>
+          </a:bodyPr>
+          <a:lstStyle/>
+          <a:p>
+            <a:pPr>
+              <a:spcAft>
+                <a:spcPts val="500"/>
+              </a:spcAft>
               <a:defRPr sz="1200" b="0">
                 <a:solidFill>
-                  <a:srgbClr val="3F5373"/>
-                </a:solidFill>
-                <a:latin typeface="Noto Sans CJK KR"/>
-              </a:defRPr>
-            </a:pPr>
-            <a:r>
-              <a:t>수치·토픽·방향을 바꿀 때는 해당 Block의 Mxx README에서 구현 파일과 기대 결과를 함께 확인합니다.</a:t>
+                  <a:srgbClr val="212B3D"/>
+                </a:solidFill>
+                <a:latin typeface="Noto Sans CJK KR"/>
+              </a:defRPr>
+            </a:pPr>
+            <a:r>
+              <a:t>• 1. visual과 별도로 collision·inertial을 넣어 물리 엔진이 계산할 값을 만듭니다.</a:t>
+            </a:r>
+          </a:p>
+          <a:p>
+            <a:pPr>
+              <a:spcAft>
+                <a:spcPts val="500"/>
+              </a:spcAft>
+              <a:defRPr sz="1200" b="0">
+                <a:solidFill>
+                  <a:srgbClr val="212B3D"/>
+                </a:solidFill>
+                <a:latin typeface="Noto Sans CJK KR"/>
+              </a:defRPr>
+            </a:pPr>
+            <a:r>
+              <a:t>• 2. LiDAR/camera/IMU sensor마다 topic과 update_rate를 정합니다.</a:t>
+            </a:r>
+          </a:p>
+          <a:p>
+            <a:pPr>
+              <a:spcAft>
+                <a:spcPts val="500"/>
+              </a:spcAft>
+              <a:defRPr sz="1200" b="0">
+                <a:solidFill>
+                  <a:srgbClr val="212B3D"/>
+                </a:solidFill>
+                <a:latin typeface="Noto Sans CJK KR"/>
+              </a:defRPr>
+            </a:pPr>
+            <a:r>
+              <a:t>• 3. DiffDrive plugin의 joint 이름·wheel radius·separation을 URDF와 맞춥니다.</a:t>
+            </a:r>
+          </a:p>
+        </p:txBody>
+      </p:sp>
+      <p:sp>
+        <p:nvSpPr>
+          <p:cNvPr id="12" name="TextBox 11"/>
+          <p:cNvSpPr txBox="1"/>
+          <p:nvPr/>
+        </p:nvSpPr>
+        <p:spPr>
+          <a:xfrm>
+            <a:off x="6565392" y="4480560"/>
+            <a:ext cx="4800600" cy="320040"/>
+          </a:xfrm>
+          <a:prstGeom prst="rect">
+            <a:avLst/>
+          </a:prstGeom>
+          <a:noFill/>
+        </p:spPr>
+        <p:txBody>
+          <a:bodyPr wrap="square" anchor="t">
+            <a:spAutoFit/>
+          </a:bodyPr>
+          <a:lstStyle/>
+          <a:p>
+            <a:pPr>
+              <a:spcAft>
+                <a:spcPts val="500"/>
+              </a:spcAft>
+              <a:defRPr sz="1600" b="1">
+                <a:solidFill>
+                  <a:srgbClr val="173E6F"/>
+                </a:solidFill>
+                <a:latin typeface="Noto Sans CJK KR"/>
+              </a:defRPr>
+            </a:pPr>
+            <a:r>
+              <a:t>실행하면 이렇게 됩니다</a:t>
+            </a:r>
+          </a:p>
+        </p:txBody>
+      </p:sp>
+      <p:sp>
+        <p:nvSpPr>
+          <p:cNvPr id="13" name="TextBox 12"/>
+          <p:cNvSpPr txBox="1"/>
+          <p:nvPr/>
+        </p:nvSpPr>
+        <p:spPr>
+          <a:xfrm>
+            <a:off x="6565392" y="4892040"/>
+            <a:ext cx="4800600" cy="822960"/>
+          </a:xfrm>
+          <a:prstGeom prst="rect">
+            <a:avLst/>
+          </a:prstGeom>
+          <a:noFill/>
+        </p:spPr>
+        <p:txBody>
+          <a:bodyPr wrap="square" anchor="t">
+            <a:spAutoFit/>
+          </a:bodyPr>
+          <a:lstStyle/>
+          <a:p>
+            <a:pPr>
+              <a:spcAft>
+                <a:spcPts val="500"/>
+              </a:spcAft>
+              <a:defRPr sz="1200" b="0">
+                <a:solidFill>
+                  <a:srgbClr val="212B3D"/>
+                </a:solidFill>
+                <a:latin typeface="Noto Sans CJK KR"/>
+              </a:defRPr>
+            </a:pPr>
+            <a:r>
+              <a:t>Gazebo는 충돌·질량을 계산하고 /scan·/imu/data·/camera/image_raw·/odom을 생성합니다.</a:t>
             </a:r>
           </a:p>
         </p:txBody>
@@ -4515,7 +5118,7 @@
               </a:defRPr>
             </a:pPr>
             <a:r>
-              <a:t>실제 실행 결과</a:t>
+              <a:t>명령어 실행 순서</a:t>
             </a:r>
           </a:p>
         </p:txBody>
@@ -4559,30 +5162,222 @@
           </a:p>
         </p:txBody>
       </p:sp>
-      <p:pic>
-        <p:nvPicPr>
-          <p:cNvPr id="6" name="Picture 5" descr="block_b_actual_terminal.png"/>
-          <p:cNvPicPr>
-            <a:picLocks noChangeAspect="1"/>
-          </p:cNvPicPr>
+      <p:sp>
+        <p:nvSpPr>
+          <p:cNvPr id="6" name="TextBox 5"/>
+          <p:cNvSpPr txBox="1"/>
           <p:nvPr/>
-        </p:nvPicPr>
-        <p:blipFill>
-          <a:blip r:embed="rId2"/>
-          <a:stretch>
-            <a:fillRect/>
-          </a:stretch>
-        </p:blipFill>
-        <p:spPr>
-          <a:xfrm>
-            <a:off x="411480" y="932688"/>
-            <a:ext cx="11365992" cy="5422392"/>
-          </a:xfrm>
-          <a:prstGeom prst="rect">
-            <a:avLst/>
-          </a:prstGeom>
-        </p:spPr>
-      </p:pic>
+        </p:nvSpPr>
+        <p:spPr>
+          <a:xfrm>
+            <a:off x="594360" y="932688"/>
+            <a:ext cx="10972800" cy="320040"/>
+          </a:xfrm>
+          <a:prstGeom prst="rect">
+            <a:avLst/>
+          </a:prstGeom>
+          <a:noFill/>
+        </p:spPr>
+        <p:txBody>
+          <a:bodyPr wrap="square" anchor="t">
+            <a:spAutoFit/>
+          </a:bodyPr>
+          <a:lstStyle/>
+          <a:p>
+            <a:pPr>
+              <a:spcAft>
+                <a:spcPts val="500"/>
+              </a:spcAft>
+              <a:defRPr sz="2100" b="1">
+                <a:solidFill>
+                  <a:srgbClr val="173E6F"/>
+                </a:solidFill>
+                <a:latin typeface="Noto Sans CJK KR"/>
+              </a:defRPr>
+            </a:pPr>
+            <a:r>
+              <a:t>권장 실행 순서</a:t>
+            </a:r>
+          </a:p>
+        </p:txBody>
+      </p:sp>
+      <p:sp>
+        <p:nvSpPr>
+          <p:cNvPr id="7" name="Rounded Rectangle 6"/>
+          <p:cNvSpPr/>
+          <p:nvPr/>
+        </p:nvSpPr>
+        <p:spPr>
+          <a:xfrm>
+            <a:off x="594360" y="1417320"/>
+            <a:ext cx="10972800" cy="4526280"/>
+          </a:xfrm>
+          <a:prstGeom prst="roundRect">
+            <a:avLst/>
+          </a:prstGeom>
+          <a:solidFill>
+            <a:srgbClr val="141C2A"/>
+          </a:solidFill>
+          <a:ln>
+            <a:solidFill>
+              <a:srgbClr val="40506E"/>
+            </a:solidFill>
+          </a:ln>
+        </p:spPr>
+        <p:style>
+          <a:lnRef idx="1">
+            <a:schemeClr val="accent1"/>
+          </a:lnRef>
+          <a:fillRef idx="3">
+            <a:schemeClr val="accent1"/>
+          </a:fillRef>
+          <a:effectRef idx="2">
+            <a:schemeClr val="accent1"/>
+          </a:effectRef>
+          <a:fontRef idx="minor">
+            <a:schemeClr val="lt1"/>
+          </a:fontRef>
+        </p:style>
+        <p:txBody>
+          <a:bodyPr rtlCol="0" anchor="ctr" lIns="237744" tIns="182880"/>
+          <a:lstStyle/>
+          <a:p>
+            <a:pPr algn="ctr">
+              <a:spcAft>
+                <a:spcPts val="700"/>
+              </a:spcAft>
+              <a:defRPr sz="1100">
+                <a:solidFill>
+                  <a:srgbClr val="DFEDFF"/>
+                </a:solidFill>
+                <a:latin typeface="Noto Sans CJK KR"/>
+              </a:defRPr>
+            </a:pPr>
+            <a:r>
+              <a:t>cd /home/lab4090/ros2_curri/agv_ws</a:t>
+            </a:r>
+          </a:p>
+          <a:p>
+            <a:pPr>
+              <a:spcAft>
+                <a:spcPts val="700"/>
+              </a:spcAft>
+              <a:defRPr sz="1100">
+                <a:solidFill>
+                  <a:srgbClr val="DFEDFF"/>
+                </a:solidFill>
+                <a:latin typeface="Noto Sans CJK KR"/>
+              </a:defRPr>
+            </a:pPr>
+            <a:r>
+              <a:t>source /opt/ros/jazzy/setup.bash</a:t>
+            </a:r>
+          </a:p>
+          <a:p>
+            <a:pPr>
+              <a:spcAft>
+                <a:spcPts val="700"/>
+              </a:spcAft>
+              <a:defRPr sz="1100">
+                <a:solidFill>
+                  <a:srgbClr val="DFEDFF"/>
+                </a:solidFill>
+                <a:latin typeface="Noto Sans CJK KR"/>
+              </a:defRPr>
+            </a:pPr>
+            <a:r>
+              <a:t>source install/setup.bash</a:t>
+            </a:r>
+          </a:p>
+          <a:p>
+            <a:pPr>
+              <a:spcAft>
+                <a:spcPts val="700"/>
+              </a:spcAft>
+              <a:defRPr sz="1100">
+                <a:solidFill>
+                  <a:srgbClr val="DFEDFF"/>
+                </a:solidFill>
+                <a:latin typeface="Noto Sans CJK KR"/>
+              </a:defRPr>
+            </a:pPr>
+            <a:r>
+              <a:t>xacro src/agv_description/urdf/agv.urdf.xacro &gt; /tmp/agv.urdf</a:t>
+            </a:r>
+          </a:p>
+          <a:p>
+            <a:pPr>
+              <a:spcAft>
+                <a:spcPts val="700"/>
+              </a:spcAft>
+              <a:defRPr sz="1100">
+                <a:solidFill>
+                  <a:srgbClr val="DFEDFF"/>
+                </a:solidFill>
+                <a:latin typeface="Noto Sans CJK KR"/>
+              </a:defRPr>
+            </a:pPr>
+            <a:r>
+              <a:t>check_urdf /tmp/agv.urdf</a:t>
+            </a:r>
+          </a:p>
+          <a:p>
+            <a:pPr>
+              <a:spcAft>
+                <a:spcPts val="700"/>
+              </a:spcAft>
+              <a:defRPr sz="1100">
+                <a:solidFill>
+                  <a:srgbClr val="DFEDFF"/>
+                </a:solidFill>
+                <a:latin typeface="Noto Sans CJK KR"/>
+              </a:defRPr>
+            </a:pPr>
+            <a:r>
+              <a:t>ros2 launch agv_gazebo gazebo.launch.py</a:t>
+            </a:r>
+          </a:p>
+        </p:txBody>
+      </p:sp>
+      <p:sp>
+        <p:nvSpPr>
+          <p:cNvPr id="8" name="TextBox 7"/>
+          <p:cNvSpPr txBox="1"/>
+          <p:nvPr/>
+        </p:nvSpPr>
+        <p:spPr>
+          <a:xfrm>
+            <a:off x="685800" y="6089904"/>
+            <a:ext cx="10789920" cy="256032"/>
+          </a:xfrm>
+          <a:prstGeom prst="rect">
+            <a:avLst/>
+          </a:prstGeom>
+          <a:noFill/>
+        </p:spPr>
+        <p:txBody>
+          <a:bodyPr wrap="square" anchor="t">
+            <a:spAutoFit/>
+          </a:bodyPr>
+          <a:lstStyle/>
+          <a:p>
+            <a:pPr>
+              <a:spcAft>
+                <a:spcPts val="500"/>
+              </a:spcAft>
+              <a:defRPr sz="1000" b="0">
+                <a:solidFill>
+                  <a:srgbClr val="505C70"/>
+                </a:solidFill>
+                <a:latin typeface="Noto Sans CJK KR"/>
+              </a:defRPr>
+            </a:pPr>
+            <a:r>
+              <a:t>명령은 Block README의 순서와 동일합니다. 새 터미널에서도 ROS와 workspace를 source해야 합니다.</a:t>
+            </a:r>
+          </a:p>
+        </p:txBody>
+      </p:sp>
     </p:spTree>
   </p:cSld>
   <p:clrMapOvr>
@@ -4717,6 +5512,535 @@
               </a:defRPr>
             </a:pPr>
             <a:r>
+              <a:t>명령어 동작과 설정 포인트</a:t>
+            </a:r>
+          </a:p>
+        </p:txBody>
+      </p:sp>
+      <p:sp>
+        <p:nvSpPr>
+          <p:cNvPr id="5" name="TextBox 4"/>
+          <p:cNvSpPr txBox="1"/>
+          <p:nvPr/>
+        </p:nvSpPr>
+        <p:spPr>
+          <a:xfrm>
+            <a:off x="411480" y="6556248"/>
+            <a:ext cx="11247120" cy="164592"/>
+          </a:xfrm>
+          <a:prstGeom prst="rect">
+            <a:avLst/>
+          </a:prstGeom>
+          <a:noFill/>
+        </p:spPr>
+        <p:txBody>
+          <a:bodyPr wrap="square" anchor="t">
+            <a:spAutoFit/>
+          </a:bodyPr>
+          <a:lstStyle/>
+          <a:p>
+            <a:pPr>
+              <a:spcAft>
+                <a:spcPts val="500"/>
+              </a:spcAft>
+              <a:defRPr sz="1000" b="0">
+                <a:solidFill>
+                  <a:srgbClr val="667080"/>
+                </a:solidFill>
+                <a:latin typeface="Noto Sans CJK KR"/>
+              </a:defRPr>
+            </a:pPr>
+            <a:r>
+              <a:t>ROS 2 + Gazebo AGV 실습 · 모든 텍스트 최소 10pt</a:t>
+            </a:r>
+          </a:p>
+        </p:txBody>
+      </p:sp>
+      <p:sp>
+        <p:nvSpPr>
+          <p:cNvPr id="6" name="TextBox 5"/>
+          <p:cNvSpPr txBox="1"/>
+          <p:nvPr/>
+        </p:nvSpPr>
+        <p:spPr>
+          <a:xfrm>
+            <a:off x="594360" y="960120"/>
+            <a:ext cx="10972800" cy="411480"/>
+          </a:xfrm>
+          <a:prstGeom prst="rect">
+            <a:avLst/>
+          </a:prstGeom>
+          <a:noFill/>
+        </p:spPr>
+        <p:txBody>
+          <a:bodyPr wrap="square" anchor="t">
+            <a:spAutoFit/>
+          </a:bodyPr>
+          <a:lstStyle/>
+          <a:p>
+            <a:pPr>
+              <a:spcAft>
+                <a:spcPts val="500"/>
+              </a:spcAft>
+              <a:defRPr sz="2100" b="1">
+                <a:solidFill>
+                  <a:srgbClr val="173E6F"/>
+                </a:solidFill>
+                <a:latin typeface="Noto Sans CJK KR"/>
+              </a:defRPr>
+            </a:pPr>
+            <a:r>
+              <a:t>이 명령이 실제로 하는 일</a:t>
+            </a:r>
+          </a:p>
+        </p:txBody>
+      </p:sp>
+      <p:sp>
+        <p:nvSpPr>
+          <p:cNvPr id="7" name="TextBox 6"/>
+          <p:cNvSpPr txBox="1"/>
+          <p:nvPr/>
+        </p:nvSpPr>
+        <p:spPr>
+          <a:xfrm>
+            <a:off x="731520" y="1508760"/>
+            <a:ext cx="10698480" cy="4480560"/>
+          </a:xfrm>
+          <a:prstGeom prst="rect">
+            <a:avLst/>
+          </a:prstGeom>
+          <a:noFill/>
+        </p:spPr>
+        <p:txBody>
+          <a:bodyPr wrap="square" anchor="t">
+            <a:spAutoFit/>
+          </a:bodyPr>
+          <a:lstStyle/>
+          <a:p>
+            <a:pPr>
+              <a:spcAft>
+                <a:spcPts val="500"/>
+              </a:spcAft>
+              <a:defRPr sz="1500" b="0">
+                <a:solidFill>
+                  <a:srgbClr val="212B3D"/>
+                </a:solidFill>
+                <a:latin typeface="Noto Sans CJK KR"/>
+              </a:defRPr>
+            </a:pPr>
+            <a:r>
+              <a:t>• xacro: macro/property/include를 순수 URDF로 펼친다. 원본의 body·wheel 치수를 바꾸면 생성 결과가 함께 바뀐다.</a:t>
+            </a:r>
+          </a:p>
+          <a:p>
+            <a:pPr>
+              <a:spcAft>
+                <a:spcPts val="500"/>
+              </a:spcAft>
+              <a:defRPr sz="1500" b="0">
+                <a:solidFill>
+                  <a:srgbClr val="212B3D"/>
+                </a:solidFill>
+                <a:latin typeface="Noto Sans CJK KR"/>
+              </a:defRPr>
+            </a:pPr>
+            <a:r>
+              <a:t>• check_urdf: root link와 joint 연결을 검사하지만 Gazebo 물리를 실행하지는 않는다.</a:t>
+            </a:r>
+          </a:p>
+          <a:p>
+            <a:pPr>
+              <a:spcAft>
+                <a:spcPts val="500"/>
+              </a:spcAft>
+              <a:defRPr sz="1500" b="0">
+                <a:solidFill>
+                  <a:srgbClr val="212B3D"/>
+                </a:solidFill>
+                <a:latin typeface="Noto Sans CJK KR"/>
+              </a:defRPr>
+            </a:pPr>
+            <a:r>
+              <a:t>• ros2 launch: model URI 경로·World·bridge를 한 LaunchDescription으로 시작한다.</a:t>
+            </a:r>
+          </a:p>
+        </p:txBody>
+      </p:sp>
+      <p:sp>
+        <p:nvSpPr>
+          <p:cNvPr id="8" name="TextBox 7"/>
+          <p:cNvSpPr txBox="1"/>
+          <p:nvPr/>
+        </p:nvSpPr>
+        <p:spPr>
+          <a:xfrm>
+            <a:off x="731520" y="5440680"/>
+            <a:ext cx="10698480" cy="502920"/>
+          </a:xfrm>
+          <a:prstGeom prst="rect">
+            <a:avLst/>
+          </a:prstGeom>
+          <a:noFill/>
+        </p:spPr>
+        <p:txBody>
+          <a:bodyPr wrap="square" anchor="t">
+            <a:spAutoFit/>
+          </a:bodyPr>
+          <a:lstStyle/>
+          <a:p>
+            <a:pPr>
+              <a:spcAft>
+                <a:spcPts val="500"/>
+              </a:spcAft>
+              <a:defRPr sz="1200" b="0">
+                <a:solidFill>
+                  <a:srgbClr val="3F5373"/>
+                </a:solidFill>
+                <a:latin typeface="Noto Sans CJK KR"/>
+              </a:defRPr>
+            </a:pPr>
+            <a:r>
+              <a:t>수치·토픽·방향을 바꿀 때는 해당 Block의 Mxx README에서 구현 파일과 기대 결과를 함께 확인합니다.</a:t>
+            </a:r>
+          </a:p>
+        </p:txBody>
+      </p:sp>
+    </p:spTree>
+  </p:cSld>
+  <p:clrMapOvr>
+    <a:masterClrMapping/>
+  </p:clrMapOvr>
+</p:sld>
+</file>
+
+<file path=ppt/slides/slide7.xml><?xml version="1.0" encoding="utf-8"?>
+<p:sld xmlns:a="http://schemas.openxmlformats.org/drawingml/2006/main" xmlns:p="http://schemas.openxmlformats.org/presentationml/2006/main" xmlns:r="http://schemas.openxmlformats.org/officeDocument/2006/relationships">
+  <p:cSld>
+    <p:spTree>
+      <p:nvGrpSpPr>
+        <p:cNvPr id="1" name=""/>
+        <p:cNvGrpSpPr/>
+        <p:nvPr/>
+      </p:nvGrpSpPr>
+      <p:grpSpPr/>
+      <p:sp>
+        <p:nvSpPr>
+          <p:cNvPr id="2" name="Rectangle 1"/>
+          <p:cNvSpPr/>
+          <p:nvPr/>
+        </p:nvSpPr>
+        <p:spPr>
+          <a:xfrm>
+            <a:off x="0" y="0"/>
+            <a:ext cx="12191695" cy="749808"/>
+          </a:xfrm>
+          <a:prstGeom prst="rect">
+            <a:avLst/>
+          </a:prstGeom>
+          <a:solidFill>
+            <a:srgbClr val="173E6F"/>
+          </a:solidFill>
+          <a:ln>
+            <a:noFill/>
+          </a:ln>
+        </p:spPr>
+        <p:style>
+          <a:lnRef idx="1">
+            <a:schemeClr val="accent1"/>
+          </a:lnRef>
+          <a:fillRef idx="3">
+            <a:schemeClr val="accent1"/>
+          </a:fillRef>
+          <a:effectRef idx="2">
+            <a:schemeClr val="accent1"/>
+          </a:effectRef>
+          <a:fontRef idx="minor">
+            <a:schemeClr val="lt1"/>
+          </a:fontRef>
+        </p:style>
+        <p:txBody>
+          <a:bodyPr rtlCol="0" anchor="ctr"/>
+          <a:lstStyle/>
+          <a:p>
+            <a:pPr algn="ctr"/>
+          </a:p>
+        </p:txBody>
+      </p:sp>
+      <p:sp>
+        <p:nvSpPr>
+          <p:cNvPr id="3" name="TextBox 2"/>
+          <p:cNvSpPr txBox="1"/>
+          <p:nvPr/>
+        </p:nvSpPr>
+        <p:spPr>
+          <a:xfrm>
+            <a:off x="411480" y="137160"/>
+            <a:ext cx="8046720" cy="320040"/>
+          </a:xfrm>
+          <a:prstGeom prst="rect">
+            <a:avLst/>
+          </a:prstGeom>
+          <a:noFill/>
+        </p:spPr>
+        <p:txBody>
+          <a:bodyPr wrap="square" anchor="t">
+            <a:spAutoFit/>
+          </a:bodyPr>
+          <a:lstStyle/>
+          <a:p>
+            <a:pPr>
+              <a:spcAft>
+                <a:spcPts val="500"/>
+              </a:spcAft>
+              <a:defRPr sz="2500" b="1">
+                <a:solidFill>
+                  <a:srgbClr val="FFFFFF"/>
+                </a:solidFill>
+                <a:latin typeface="Noto Sans CJK KR"/>
+              </a:defRPr>
+            </a:pPr>
+            <a:r>
+              <a:t>Block B — AGV 로봇 제작</a:t>
+            </a:r>
+          </a:p>
+        </p:txBody>
+      </p:sp>
+      <p:sp>
+        <p:nvSpPr>
+          <p:cNvPr id="4" name="TextBox 3"/>
+          <p:cNvSpPr txBox="1"/>
+          <p:nvPr/>
+        </p:nvSpPr>
+        <p:spPr>
+          <a:xfrm>
+            <a:off x="8321040" y="182880"/>
+            <a:ext cx="3474720" cy="256032"/>
+          </a:xfrm>
+          <a:prstGeom prst="rect">
+            <a:avLst/>
+          </a:prstGeom>
+          <a:noFill/>
+        </p:spPr>
+        <p:txBody>
+          <a:bodyPr wrap="square" anchor="t">
+            <a:spAutoFit/>
+          </a:bodyPr>
+          <a:lstStyle/>
+          <a:p>
+            <a:pPr>
+              <a:spcAft>
+                <a:spcPts val="500"/>
+              </a:spcAft>
+              <a:defRPr sz="1000" b="0">
+                <a:solidFill>
+                  <a:srgbClr val="DCEAFC"/>
+                </a:solidFill>
+                <a:latin typeface="Noto Sans CJK KR"/>
+              </a:defRPr>
+            </a:pPr>
+            <a:r>
+              <a:t>실제 실행 결과</a:t>
+            </a:r>
+          </a:p>
+        </p:txBody>
+      </p:sp>
+      <p:sp>
+        <p:nvSpPr>
+          <p:cNvPr id="5" name="TextBox 4"/>
+          <p:cNvSpPr txBox="1"/>
+          <p:nvPr/>
+        </p:nvSpPr>
+        <p:spPr>
+          <a:xfrm>
+            <a:off x="411480" y="6556248"/>
+            <a:ext cx="11247120" cy="164592"/>
+          </a:xfrm>
+          <a:prstGeom prst="rect">
+            <a:avLst/>
+          </a:prstGeom>
+          <a:noFill/>
+        </p:spPr>
+        <p:txBody>
+          <a:bodyPr wrap="square" anchor="t">
+            <a:spAutoFit/>
+          </a:bodyPr>
+          <a:lstStyle/>
+          <a:p>
+            <a:pPr>
+              <a:spcAft>
+                <a:spcPts val="500"/>
+              </a:spcAft>
+              <a:defRPr sz="1000" b="0">
+                <a:solidFill>
+                  <a:srgbClr val="667080"/>
+                </a:solidFill>
+                <a:latin typeface="Noto Sans CJK KR"/>
+              </a:defRPr>
+            </a:pPr>
+            <a:r>
+              <a:t>ROS 2 + Gazebo AGV 실습 · 모든 텍스트 최소 10pt</a:t>
+            </a:r>
+          </a:p>
+        </p:txBody>
+      </p:sp>
+      <p:pic>
+        <p:nvPicPr>
+          <p:cNvPr id="6" name="Picture 5" descr="block_b_actual_terminal.png"/>
+          <p:cNvPicPr>
+            <a:picLocks noChangeAspect="1"/>
+          </p:cNvPicPr>
+          <p:nvPr/>
+        </p:nvPicPr>
+        <p:blipFill>
+          <a:blip r:embed="rId2"/>
+          <a:stretch>
+            <a:fillRect/>
+          </a:stretch>
+        </p:blipFill>
+        <p:spPr>
+          <a:xfrm>
+            <a:off x="411480" y="932688"/>
+            <a:ext cx="11365992" cy="5422392"/>
+          </a:xfrm>
+          <a:prstGeom prst="rect">
+            <a:avLst/>
+          </a:prstGeom>
+        </p:spPr>
+      </p:pic>
+    </p:spTree>
+  </p:cSld>
+  <p:clrMapOvr>
+    <a:masterClrMapping/>
+  </p:clrMapOvr>
+</p:sld>
+</file>
+
+<file path=ppt/slides/slide8.xml><?xml version="1.0" encoding="utf-8"?>
+<p:sld xmlns:a="http://schemas.openxmlformats.org/drawingml/2006/main" xmlns:p="http://schemas.openxmlformats.org/presentationml/2006/main" xmlns:r="http://schemas.openxmlformats.org/officeDocument/2006/relationships">
+  <p:cSld>
+    <p:spTree>
+      <p:nvGrpSpPr>
+        <p:cNvPr id="1" name=""/>
+        <p:cNvGrpSpPr/>
+        <p:nvPr/>
+      </p:nvGrpSpPr>
+      <p:grpSpPr/>
+      <p:sp>
+        <p:nvSpPr>
+          <p:cNvPr id="2" name="Rectangle 1"/>
+          <p:cNvSpPr/>
+          <p:nvPr/>
+        </p:nvSpPr>
+        <p:spPr>
+          <a:xfrm>
+            <a:off x="0" y="0"/>
+            <a:ext cx="12191695" cy="749808"/>
+          </a:xfrm>
+          <a:prstGeom prst="rect">
+            <a:avLst/>
+          </a:prstGeom>
+          <a:solidFill>
+            <a:srgbClr val="173E6F"/>
+          </a:solidFill>
+          <a:ln>
+            <a:noFill/>
+          </a:ln>
+        </p:spPr>
+        <p:style>
+          <a:lnRef idx="1">
+            <a:schemeClr val="accent1"/>
+          </a:lnRef>
+          <a:fillRef idx="3">
+            <a:schemeClr val="accent1"/>
+          </a:fillRef>
+          <a:effectRef idx="2">
+            <a:schemeClr val="accent1"/>
+          </a:effectRef>
+          <a:fontRef idx="minor">
+            <a:schemeClr val="lt1"/>
+          </a:fontRef>
+        </p:style>
+        <p:txBody>
+          <a:bodyPr rtlCol="0" anchor="ctr"/>
+          <a:lstStyle/>
+          <a:p>
+            <a:pPr algn="ctr"/>
+          </a:p>
+        </p:txBody>
+      </p:sp>
+      <p:sp>
+        <p:nvSpPr>
+          <p:cNvPr id="3" name="TextBox 2"/>
+          <p:cNvSpPr txBox="1"/>
+          <p:nvPr/>
+        </p:nvSpPr>
+        <p:spPr>
+          <a:xfrm>
+            <a:off x="411480" y="137160"/>
+            <a:ext cx="8046720" cy="320040"/>
+          </a:xfrm>
+          <a:prstGeom prst="rect">
+            <a:avLst/>
+          </a:prstGeom>
+          <a:noFill/>
+        </p:spPr>
+        <p:txBody>
+          <a:bodyPr wrap="square" anchor="t">
+            <a:spAutoFit/>
+          </a:bodyPr>
+          <a:lstStyle/>
+          <a:p>
+            <a:pPr>
+              <a:spcAft>
+                <a:spcPts val="500"/>
+              </a:spcAft>
+              <a:defRPr sz="2500" b="1">
+                <a:solidFill>
+                  <a:srgbClr val="FFFFFF"/>
+                </a:solidFill>
+                <a:latin typeface="Noto Sans CJK KR"/>
+              </a:defRPr>
+            </a:pPr>
+            <a:r>
+              <a:t>Block B — AGV 로봇 제작</a:t>
+            </a:r>
+          </a:p>
+        </p:txBody>
+      </p:sp>
+      <p:sp>
+        <p:nvSpPr>
+          <p:cNvPr id="4" name="TextBox 3"/>
+          <p:cNvSpPr txBox="1"/>
+          <p:nvPr/>
+        </p:nvSpPr>
+        <p:spPr>
+          <a:xfrm>
+            <a:off x="8321040" y="182880"/>
+            <a:ext cx="3474720" cy="256032"/>
+          </a:xfrm>
+          <a:prstGeom prst="rect">
+            <a:avLst/>
+          </a:prstGeom>
+          <a:noFill/>
+        </p:spPr>
+        <p:txBody>
+          <a:bodyPr wrap="square" anchor="t">
+            <a:spAutoFit/>
+          </a:bodyPr>
+          <a:lstStyle/>
+          <a:p>
+            <a:pPr>
+              <a:spcAft>
+                <a:spcPts val="500"/>
+              </a:spcAft>
+              <a:defRPr sz="1000" b="0">
+                <a:solidFill>
+                  <a:srgbClr val="DCEAFC"/>
+                </a:solidFill>
+                <a:latin typeface="Noto Sans CJK KR"/>
+              </a:defRPr>
+            </a:pPr>
+            <a:r>
               <a:t>실제 Gazebo / RViz 화면</a:t>
             </a:r>
           </a:p>
@@ -4832,7 +6156,7 @@
 </p:sld>
 </file>
 
-<file path=ppt/slides/slide7.xml><?xml version="1.0" encoding="utf-8"?>
+<file path=ppt/slides/slide9.xml><?xml version="1.0" encoding="utf-8"?>
 <p:sld xmlns:a="http://schemas.openxmlformats.org/drawingml/2006/main" xmlns:p="http://schemas.openxmlformats.org/presentationml/2006/main" xmlns:r="http://schemas.openxmlformats.org/officeDocument/2006/relationships">
   <p:cSld>
     <p:spTree>
